--- a/docs/usage/Carbon-Urban-DSS-guide.pptx
+++ b/docs/usage/Carbon-Urban-DSS-guide.pptx
@@ -1579,7 +1579,7 @@
           <a:p>
             <a:r>
               <a:rPr lang="en-US" dirty="0"/>
-              <a:t>전국으로 되는 것은 인구·주택·공동주택 같은 수요 측 지표이고, 에너지·탄소는 아직 상세 자료를 모은 전주와 수원에만 있습니다. 다른 지역은 상세 자료 수집으로 채웁니다.</a:t>
+              <a:t>전국으로 되는 것은 인구·주택·공동주택 지표와 시·군·구 단위 전력 판매량·공식 온실가스입니다. 건물·격자 단위 에너지와 탄소는 상세 자료를 모은 전주와 수원에만 있고, 완주군을 모으는 중입니다.</a:t>
             </a:r>
             <a:endParaRPr lang="en-US" dirty="0"/>
           </a:p>
@@ -1667,7 +1667,7 @@
           <a:p>
             <a:r>
               <a:rPr lang="en-US" dirty="0"/>
-              <a:t>가장 먼저 할 일은 SGIS 500m 빠진 블록 재신청과 한전 시군구별 전력사용량 파일입니다. 한전 파일이 있으면 전국 시·군·구의 전력과 전력 탄소를 비교할 수 있습니다.</a:t>
+              <a:t>한전 시군구별 전력판매량, 지역 온실가스 인벤토리, 도시가스 판매량, 연도별 전력 배출계수는 받아서 전국 지도에 붙였습니다. 남은 것은 SGIS 500m 빠진 블록 재신청과 건물·지적 전국 파일, K-apt 한도 상향입니다.</a:t>
             </a:r>
             <a:endParaRPr lang="en-US" dirty="0"/>
           </a:p>
@@ -2107,7 +2107,7 @@
           <a:p>
             <a:r>
               <a:rPr lang="en-US" dirty="0"/>
-              <a:t>첫 화면은 전국입니다. 시·도를 지도에서 누르거나 왼쪽 메뉴에서 고르면 됩니다. 색은 전국 어디에나 있는 자료만 씁니다. SGIS 인구·가구, 500m 격자 통계, K-apt 단지 목록입니다.</a:t>
+              <a:t>첫 화면은 전국입니다. 시·도를 지도에서 누르거나 왼쪽 메뉴에서 고르면 됩니다. 색은 전국 어디에나 있는 자료만 씁니다. SGIS 인구·가구, 500m 격자 통계, K-apt 단지 목록, 한전 시군구별 전력판매량, 온실가스종합정보센터 지역 인벤토리입니다.</a:t>
             </a:r>
             <a:endParaRPr lang="en-US" dirty="0"/>
           </a:p>
@@ -10040,7 +10040,7 @@
                 <a:ea typeface="Malgun Gothic" pitchFamily="34" charset="-122"/>
                 <a:cs typeface="Malgun Gothic" pitchFamily="34" charset="-120"/>
               </a:rPr>
-              <a:t>전력 탄소는 등록된 전력 배출계수(0.4541 kgCO₂eq/kWh)를, 도시가스는 "가정" 계수(0.1826)를 따로 표시해 씁니다.</a:t>
+              <a:t>전력 탄소는 그해 말까지 공표된 GIR 계수(2022~2024년 0.4781, 2025년 0.4541)를, 도시가스는 "가정" 계수(0.1826)를 따로 표시해 씁니다.</a:t>
             </a:r>
             <a:endParaRPr lang="en-US" sz="1250" dirty="0"/>
           </a:p>
@@ -11389,7 +11389,7 @@
                 <a:ea typeface="Malgun Gothic" pitchFamily="34" charset="-122"/>
                 <a:cs typeface="Malgun Gothic" pitchFamily="34" charset="-120"/>
               </a:rPr>
-              <a:t>자료 현황 (2026-09-29, PC 실측)</a:t>
+              <a:t>자료 현황 (2026-09-30, PC 실측)</a:t>
             </a:r>
             <a:endParaRPr lang="en-US" sz="1200" dirty="0"/>
           </a:p>
@@ -12047,7 +12047,7 @@
                 <a:ea typeface="Malgun Gothic" pitchFamily="34" charset="-122"/>
                 <a:cs typeface="Malgun Gothic" pitchFamily="34" charset="-120"/>
               </a:rPr>
-              <a:t>공동주택 분포, 조례 건폐율·용적률 상한 (160곳)</a:t>
+              <a:t>전력 판매량(한전 2015~2025)·온실가스(GIR 2010~2023)</a:t>
             </a:r>
             <a:endParaRPr lang="en-US" sz="1250" dirty="0"/>
           </a:p>
@@ -12068,7 +12068,7 @@
                 <a:ea typeface="Malgun Gothic" pitchFamily="34" charset="-122"/>
                 <a:cs typeface="Malgun Gothic" pitchFamily="34" charset="-120"/>
               </a:rPr>
-              <a:t>어느 시·군·구든 격자·읍면동 기본 지도 (수 초)</a:t>
+              <a:t>어느 시·군·구든 기본 지도(수 초), 조례 상한 160곳</a:t>
             </a:r>
             <a:endParaRPr lang="en-US" sz="1250" dirty="0"/>
           </a:p>
@@ -12920,7 +12920,7 @@
                           <a:ea typeface="Malgun Gothic" pitchFamily="34" charset="-122"/>
                           <a:cs typeface="Malgun Gothic" pitchFamily="34" charset="-120"/>
                         </a:rPr>
-                        <a:t>한전 시군구별 전력사용량</a:t>
+                        <a:t>건물에너지 전국 파일 (전기·가스)</a:t>
                       </a:r>
                       <a:endParaRPr lang="en-US" sz="1200" dirty="0">
                         <a:latin typeface="Malgun Gothic" charset="0"/>
@@ -12988,7 +12988,7 @@
                           <a:ea typeface="Malgun Gothic" pitchFamily="34" charset="-122"/>
                           <a:cs typeface="Malgun Gothic" pitchFamily="34" charset="-120"/>
                         </a:rPr>
-                        <a:t>전국 시·군·구 전력·전력 탄소 비교 (공공데이터포털 3069444)</a:t>
+                        <a:t>API 한도 없이 어느 시·군·구든 건물 에너지 (건축HUB, 전국 약 7,600만 행)</a:t>
                       </a:r>
                       <a:endParaRPr lang="en-US" sz="1200" dirty="0">
                         <a:latin typeface="Malgun Gothic" charset="0"/>
@@ -13126,7 +13126,7 @@
                           <a:ea typeface="Malgun Gothic" pitchFamily="34" charset="-122"/>
                           <a:cs typeface="Malgun Gothic" pitchFamily="34" charset="-120"/>
                         </a:rPr>
-                        <a:t>건물에너지 전국 파일 (전기·가스)</a:t>
+                        <a:t>GIS건물통합정보·연속지적·용도지역 파일</a:t>
                       </a:r>
                       <a:endParaRPr lang="en-US" sz="1200" dirty="0">
                         <a:latin typeface="Malgun Gothic" charset="0"/>
@@ -13194,7 +13194,7 @@
                           <a:ea typeface="Malgun Gothic" pitchFamily="34" charset="-122"/>
                           <a:cs typeface="Malgun Gothic" pitchFamily="34" charset="-120"/>
                         </a:rPr>
-                        <a:t>API 한도 없이 어느 시·군·구든 건물 에너지</a:t>
+                        <a:t>호출 없이 전국 상세 지도 (건물·필지·용도지역, V-World 시·도별 SHP)</a:t>
                       </a:r>
                       <a:endParaRPr lang="en-US" sz="1200" dirty="0">
                         <a:latin typeface="Malgun Gothic" charset="0"/>
@@ -13332,7 +13332,7 @@
                           <a:ea typeface="Malgun Gothic" pitchFamily="34" charset="-122"/>
                           <a:cs typeface="Malgun Gothic" pitchFamily="34" charset="-120"/>
                         </a:rPr>
-                        <a:t>GIS건물통합정보·연속지적·용도지역 파일</a:t>
+                        <a:t>K-apt API 호출 한도 상향</a:t>
                       </a:r>
                       <a:endParaRPr lang="en-US" sz="1200" dirty="0">
                         <a:latin typeface="Malgun Gothic" charset="0"/>
@@ -13400,7 +13400,7 @@
                           <a:ea typeface="Malgun Gothic" pitchFamily="34" charset="-122"/>
                           <a:cs typeface="Malgun Gothic" pitchFamily="34" charset="-120"/>
                         </a:rPr>
-                        <a:t>호출 없이 전국 상세 지도 (건물·필지·용도지역)</a:t>
+                        <a:t>여러 시·군·구 공동주택 에너지를 며칠 안에 (운영계정 신청)</a:t>
                       </a:r>
                       <a:endParaRPr lang="en-US" sz="1200" dirty="0">
                         <a:latin typeface="Malgun Gothic" charset="0"/>
@@ -13538,7 +13538,7 @@
                           <a:ea typeface="Malgun Gothic" pitchFamily="34" charset="-122"/>
                           <a:cs typeface="Malgun Gothic" pitchFamily="34" charset="-120"/>
                         </a:rPr>
-                        <a:t>시·도별 도시가스 판매량</a:t>
+                        <a:t>공식 도시가스 배출계수·열량 기준</a:t>
                       </a:r>
                       <a:endParaRPr lang="en-US" sz="1200" dirty="0">
                         <a:latin typeface="Malgun Gothic" charset="0"/>
@@ -13606,7 +13606,7 @@
                           <a:ea typeface="Malgun Gothic" pitchFamily="34" charset="-122"/>
                           <a:cs typeface="Malgun Gothic" pitchFamily="34" charset="-120"/>
                         </a:rPr>
-                        <a:t>가스 탄소의 시·도 총량 비교</a:t>
+                        <a:t>가스 탄소의 가정 계수(0.1826) 교체</a:t>
                       </a:r>
                       <a:endParaRPr lang="en-US" sz="1200" dirty="0">
                         <a:latin typeface="Malgun Gothic" charset="0"/>
@@ -13744,7 +13744,7 @@
                           <a:ea typeface="Malgun Gothic" pitchFamily="34" charset="-122"/>
                           <a:cs typeface="Malgun Gothic" pitchFamily="34" charset="-120"/>
                         </a:rPr>
-                        <a:t>지역 온실가스 배출량 (GIR)</a:t>
+                        <a:t>2025 승인 전력 배출계수 적용 여부</a:t>
                       </a:r>
                       <a:endParaRPr lang="en-US" sz="1200" dirty="0">
                         <a:latin typeface="Malgun Gothic" charset="0"/>
@@ -13812,7 +13812,7 @@
                           <a:ea typeface="Malgun Gothic" pitchFamily="34" charset="-122"/>
                           <a:cs typeface="Malgun Gothic" pitchFamily="34" charset="-120"/>
                         </a:rPr>
-                        <a:t>격자 탄소 추정의 검증 기준</a:t>
+                        <a:t>2025-12-18 공표 (2023년 0.4173 · 21~23 평균 0.4330), 적용하면 2025년 전력 탄소 약 5~8% 감소</a:t>
                       </a:r>
                       <a:endParaRPr lang="en-US" sz="1200" dirty="0">
                         <a:latin typeface="Malgun Gothic" charset="0"/>
@@ -13864,212 +13864,6 @@
                   </a:tcPr>
                 </a:tc>
               </a:tr>
-              <a:tr h="512064">
-                <a:tc>
-                  <a:txBody>
-                    <a:bodyPr/>
-                    <a:lstStyle/>
-                    <a:p>
-                      <a:pPr algn="ctr" indent="0" marL="0">
-                        <a:buNone/>
-                      </a:pPr>
-                      <a:r>
-                        <a:rPr lang="en-US" sz="1200" dirty="0">
-                          <a:solidFill>
-                            <a:srgbClr val="505B55"/>
-                          </a:solidFill>
-                          <a:latin typeface="Malgun Gothic" pitchFamily="34" charset="0"/>
-                          <a:ea typeface="Malgun Gothic" pitchFamily="34" charset="-122"/>
-                          <a:cs typeface="Malgun Gothic" pitchFamily="34" charset="-120"/>
-                        </a:rPr>
-                        <a:t>7</a:t>
-                      </a:r>
-                      <a:endParaRPr lang="en-US" sz="1200" dirty="0">
-                        <a:latin typeface="Malgun Gothic" charset="0"/>
-                        <a:ea typeface="Malgun Gothic" charset="0"/>
-                        <a:cs typeface="Malgun Gothic" charset="0"/>
-                      </a:endParaRPr>
-                    </a:p>
-                  </a:txBody>
-                  <a:tcPr marL="109728" marR="109728" marT="36576" marB="36576" anchor="ctr">
-                    <a:lnL w="6350" cap="flat" cmpd="sng" algn="ctr">
-                      <a:solidFill>
-                        <a:srgbClr val="D9D7CE"/>
-                      </a:solidFill>
-                      <a:prstDash val="solid"/>
-                      <a:round/>
-                      <a:headEnd type="none" w="med" len="med"/>
-                      <a:tailEnd type="none" w="med" len="med"/>
-                    </a:lnL>
-                    <a:lnR w="6350" cap="flat" cmpd="sng" algn="ctr">
-                      <a:solidFill>
-                        <a:srgbClr val="D9D7CE"/>
-                      </a:solidFill>
-                      <a:prstDash val="solid"/>
-                      <a:round/>
-                      <a:headEnd type="none" w="med" len="med"/>
-                      <a:tailEnd type="none" w="med" len="med"/>
-                    </a:lnR>
-                    <a:lnT w="6350" cap="flat" cmpd="sng" algn="ctr">
-                      <a:solidFill>
-                        <a:srgbClr val="D9D7CE"/>
-                      </a:solidFill>
-                      <a:prstDash val="solid"/>
-                      <a:round/>
-                      <a:headEnd type="none" w="med" len="med"/>
-                      <a:tailEnd type="none" w="med" len="med"/>
-                    </a:lnT>
-                    <a:lnB w="6350" cap="flat" cmpd="sng" algn="ctr">
-                      <a:solidFill>
-                        <a:srgbClr val="D9D7CE"/>
-                      </a:solidFill>
-                      <a:prstDash val="solid"/>
-                      <a:round/>
-                      <a:headEnd type="none" w="med" len="med"/>
-                      <a:tailEnd type="none" w="med" len="med"/>
-                    </a:lnB>
-                    <a:solidFill>
-                      <a:srgbClr val="F4F6F4"/>
-                    </a:solidFill>
-                  </a:tcPr>
-                </a:tc>
-                <a:tc>
-                  <a:txBody>
-                    <a:bodyPr/>
-                    <a:lstStyle/>
-                    <a:p>
-                      <a:pPr algn="l" indent="0" marL="0">
-                        <a:buNone/>
-                      </a:pPr>
-                      <a:r>
-                        <a:rPr lang="en-US" sz="1200" b="1" dirty="0">
-                          <a:solidFill>
-                            <a:srgbClr val="1C2622"/>
-                          </a:solidFill>
-                          <a:latin typeface="Malgun Gothic" pitchFamily="34" charset="0"/>
-                          <a:ea typeface="Malgun Gothic" pitchFamily="34" charset="-122"/>
-                          <a:cs typeface="Malgun Gothic" pitchFamily="34" charset="-120"/>
-                        </a:rPr>
-                        <a:t>K-apt API 호출 한도 상향 · 배출계수</a:t>
-                      </a:r>
-                      <a:endParaRPr lang="en-US" sz="1200" dirty="0">
-                        <a:latin typeface="Malgun Gothic" charset="0"/>
-                        <a:ea typeface="Malgun Gothic" charset="0"/>
-                        <a:cs typeface="Malgun Gothic" charset="0"/>
-                      </a:endParaRPr>
-                    </a:p>
-                  </a:txBody>
-                  <a:tcPr marL="109728" marR="109728" marT="36576" marB="36576" anchor="ctr">
-                    <a:lnL w="6350" cap="flat" cmpd="sng" algn="ctr">
-                      <a:solidFill>
-                        <a:srgbClr val="D9D7CE"/>
-                      </a:solidFill>
-                      <a:prstDash val="solid"/>
-                      <a:round/>
-                      <a:headEnd type="none" w="med" len="med"/>
-                      <a:tailEnd type="none" w="med" len="med"/>
-                    </a:lnL>
-                    <a:lnR w="6350" cap="flat" cmpd="sng" algn="ctr">
-                      <a:solidFill>
-                        <a:srgbClr val="D9D7CE"/>
-                      </a:solidFill>
-                      <a:prstDash val="solid"/>
-                      <a:round/>
-                      <a:headEnd type="none" w="med" len="med"/>
-                      <a:tailEnd type="none" w="med" len="med"/>
-                    </a:lnR>
-                    <a:lnT w="6350" cap="flat" cmpd="sng" algn="ctr">
-                      <a:solidFill>
-                        <a:srgbClr val="D9D7CE"/>
-                      </a:solidFill>
-                      <a:prstDash val="solid"/>
-                      <a:round/>
-                      <a:headEnd type="none" w="med" len="med"/>
-                      <a:tailEnd type="none" w="med" len="med"/>
-                    </a:lnT>
-                    <a:lnB w="6350" cap="flat" cmpd="sng" algn="ctr">
-                      <a:solidFill>
-                        <a:srgbClr val="D9D7CE"/>
-                      </a:solidFill>
-                      <a:prstDash val="solid"/>
-                      <a:round/>
-                      <a:headEnd type="none" w="med" len="med"/>
-                      <a:tailEnd type="none" w="med" len="med"/>
-                    </a:lnB>
-                    <a:solidFill>
-                      <a:srgbClr val="F4F6F4"/>
-                    </a:solidFill>
-                  </a:tcPr>
-                </a:tc>
-                <a:tc>
-                  <a:txBody>
-                    <a:bodyPr/>
-                    <a:lstStyle/>
-                    <a:p>
-                      <a:pPr algn="l" indent="0" marL="0">
-                        <a:buNone/>
-                      </a:pPr>
-                      <a:r>
-                        <a:rPr lang="en-US" sz="1200" dirty="0">
-                          <a:solidFill>
-                            <a:srgbClr val="505B55"/>
-                          </a:solidFill>
-                          <a:latin typeface="Malgun Gothic" pitchFamily="34" charset="0"/>
-                          <a:ea typeface="Malgun Gothic" pitchFamily="34" charset="-122"/>
-                          <a:cs typeface="Malgun Gothic" pitchFamily="34" charset="-120"/>
-                        </a:rPr>
-                        <a:t>공동주택 에너지 수집 속도, 연도별 전력·공식 가스 계수</a:t>
-                      </a:r>
-                      <a:endParaRPr lang="en-US" sz="1200" dirty="0">
-                        <a:latin typeface="Malgun Gothic" charset="0"/>
-                        <a:ea typeface="Malgun Gothic" charset="0"/>
-                        <a:cs typeface="Malgun Gothic" charset="0"/>
-                      </a:endParaRPr>
-                    </a:p>
-                  </a:txBody>
-                  <a:tcPr marL="109728" marR="109728" marT="36576" marB="36576" anchor="ctr">
-                    <a:lnL w="6350" cap="flat" cmpd="sng" algn="ctr">
-                      <a:solidFill>
-                        <a:srgbClr val="D9D7CE"/>
-                      </a:solidFill>
-                      <a:prstDash val="solid"/>
-                      <a:round/>
-                      <a:headEnd type="none" w="med" len="med"/>
-                      <a:tailEnd type="none" w="med" len="med"/>
-                    </a:lnL>
-                    <a:lnR w="6350" cap="flat" cmpd="sng" algn="ctr">
-                      <a:solidFill>
-                        <a:srgbClr val="D9D7CE"/>
-                      </a:solidFill>
-                      <a:prstDash val="solid"/>
-                      <a:round/>
-                      <a:headEnd type="none" w="med" len="med"/>
-                      <a:tailEnd type="none" w="med" len="med"/>
-                    </a:lnR>
-                    <a:lnT w="6350" cap="flat" cmpd="sng" algn="ctr">
-                      <a:solidFill>
-                        <a:srgbClr val="D9D7CE"/>
-                      </a:solidFill>
-                      <a:prstDash val="solid"/>
-                      <a:round/>
-                      <a:headEnd type="none" w="med" len="med"/>
-                      <a:tailEnd type="none" w="med" len="med"/>
-                    </a:lnT>
-                    <a:lnB w="6350" cap="flat" cmpd="sng" algn="ctr">
-                      <a:solidFill>
-                        <a:srgbClr val="D9D7CE"/>
-                      </a:solidFill>
-                      <a:prstDash val="solid"/>
-                      <a:round/>
-                      <a:headEnd type="none" w="med" len="med"/>
-                      <a:tailEnd type="none" w="med" len="med"/>
-                    </a:lnB>
-                    <a:solidFill>
-                      <a:srgbClr val="F4F6F4"/>
-                    </a:solidFill>
-                  </a:tcPr>
-                </a:tc>
-              </a:tr>
             </a:tbl>
           </a:graphicData>
         </a:graphic>
@@ -14077,6 +13871,45 @@
       <p:sp>
         <p:nvSpPr>
           <p:cNvPr id="6" name="Text 3"/>
+          <p:cNvSpPr txBox="1"/>
+          <p:nvPr/>
+        </p:nvSpPr>
+        <p:spPr>
+          <a:xfrm>
+            <a:off x="457200" y="5230368"/>
+            <a:ext cx="11247120" cy="274320"/>
+          </a:xfrm>
+          <a:prstGeom prst="rect">
+            <a:avLst/>
+          </a:prstGeom>
+          <a:noFill/>
+          <a:ln/>
+        </p:spPr>
+        <p:txBody>
+          <a:bodyPr wrap="square" lIns="0" tIns="0" rIns="0" bIns="0" rtlCol="0" anchor="t"/>
+          <a:lstStyle/>
+          <a:p>
+            <a:pPr indent="0" marL="0">
+              <a:buNone/>
+            </a:pPr>
+            <a:r>
+              <a:rPr lang="en-US" sz="1150" b="1" dirty="0">
+                <a:solidFill>
+                  <a:srgbClr val="2F5D50"/>
+                </a:solidFill>
+                <a:latin typeface="Malgun Gothic" pitchFamily="34" charset="0"/>
+                <a:ea typeface="Malgun Gothic" pitchFamily="34" charset="-122"/>
+                <a:cs typeface="Malgun Gothic" pitchFamily="34" charset="-120"/>
+              </a:rPr>
+              <a:t>2026-09-30 받아 적용: 한전 시군구별 전력판매량(2015~2025), GIR 지역 온실가스 인벤토리(시·군·구 2010~2023), 가스공사 시·도 도시가스 판매량, 공표 회차별 전력 배출계수</a:t>
+            </a:r>
+            <a:endParaRPr lang="en-US" sz="1150" dirty="0"/>
+          </a:p>
+        </p:txBody>
+      </p:sp>
+      <p:sp>
+        <p:nvSpPr>
+          <p:cNvPr id="7" name="Text 4"/>
           <p:cNvSpPr txBox="1"/>
           <p:nvPr/>
         </p:nvSpPr>
@@ -19191,7 +19024,7 @@
                 <a:ea typeface="Malgun Gothic" pitchFamily="34" charset="-122"/>
                 <a:cs typeface="Malgun Gothic" pitchFamily="34" charset="-120"/>
               </a:rPr>
-              <a:t>"시·도 색"에서 인구·인구밀도·가구·인구 증감률·주택·종사자·K-apt 단지 7개 중 하나를 고릅니다.</a:t>
+              <a:t>"시·도 색"에서 인구·주택·단지와 전력(한전)·온실가스(GIR) 등 14개 지표 중 하나를 고릅니다.</a:t>
             </a:r>
             <a:endParaRPr lang="en-US" sz="1150" dirty="0"/>
           </a:p>
